--- a/data/Presentation_and_note/Better_together.pptx
+++ b/data/Presentation_and_note/Better_together.pptx
@@ -19,11 +19,9 @@
     <p:sldId id="262" r:id="rId13"/>
     <p:sldId id="263" r:id="rId14"/>
     <p:sldId id="264" r:id="rId15"/>
-    <p:sldId id="269" r:id="rId16"/>
-    <p:sldId id="265" r:id="rId17"/>
-    <p:sldId id="266" r:id="rId18"/>
-    <p:sldId id="267" r:id="rId19"/>
-    <p:sldId id="268" r:id="rId20"/>
+    <p:sldId id="266" r:id="rId16"/>
+    <p:sldId id="267" r:id="rId17"/>
+    <p:sldId id="268" r:id="rId18"/>
   </p:sldIdLst>
   <p:sldSz cx="19799300" cy="11160125"/>
   <p:notesSz cx="7559675" cy="10691813"/>
@@ -122,6 +120,11 @@
       </a:defRPr>
     </a:lvl9pPr>
   </p:defaultTextStyle>
+  <p:extLst>
+    <p:ext uri="{EFAFB233-063F-42B5-8137-9DF3F51BA10A}">
+      <p15:sldGuideLst xmlns:p15="http://schemas.microsoft.com/office/powerpoint/2012/main"/>
+    </p:ext>
+  </p:extLst>
 </p:presentation>
 </file>
 
@@ -16926,7 +16929,7 @@
         </p:nvSpPr>
         <p:spPr>
           <a:xfrm>
-            <a:off x="1080000" y="3600000"/>
+            <a:off x="965700" y="3537900"/>
             <a:ext cx="13260240" cy="2155680"/>
           </a:xfrm>
           <a:prstGeom prst="rect">
@@ -17375,13 +17378,7 @@
     </p:bg>
     <p:spTree>
       <p:nvGrpSpPr>
-        <p:cNvPr id="1" name="">
-          <a:extLst>
-            <a:ext uri="{FF2B5EF4-FFF2-40B4-BE49-F238E27FC236}">
-              <a16:creationId xmlns:a16="http://schemas.microsoft.com/office/drawing/2014/main" id="{CA74B567-2AED-6E88-09BA-B79FAC62FDAE}"/>
-            </a:ext>
-          </a:extLst>
-        </p:cNvPr>
+        <p:cNvPr id="1" name=""/>
         <p:cNvGrpSpPr/>
         <p:nvPr/>
       </p:nvGrpSpPr>
@@ -17395,28 +17392,22 @@
       </p:grpSpPr>
       <p:sp>
         <p:nvSpPr>
-          <p:cNvPr id="286" name="Скругленный прямоугольник 21">
-            <a:extLst>
-              <a:ext uri="{FF2B5EF4-FFF2-40B4-BE49-F238E27FC236}">
-                <a16:creationId xmlns:a16="http://schemas.microsoft.com/office/drawing/2014/main" id="{10718DB5-A1F4-B6CB-7B46-BE6B27CD97E4}"/>
-              </a:ext>
-            </a:extLst>
-          </p:cNvPr>
+          <p:cNvPr id="296" name="Скругленный прямоугольник 8"/>
           <p:cNvSpPr/>
           <p:nvPr/>
         </p:nvSpPr>
         <p:spPr>
           <a:xfrm>
-            <a:off x="9966240" y="2203920"/>
-            <a:ext cx="7852680" cy="1288800"/>
+            <a:off x="1080000" y="374040"/>
+            <a:ext cx="17458920" cy="885600"/>
           </a:xfrm>
           <a:prstGeom prst="roundRect">
             <a:avLst>
-              <a:gd name="adj" fmla="val 8485"/>
+              <a:gd name="adj" fmla="val 30536"/>
             </a:avLst>
           </a:prstGeom>
           <a:solidFill>
-            <a:schemeClr val="bg1"/>
+            <a:srgbClr val="FFDD2D"/>
           </a:solidFill>
           <a:ln>
             <a:noFill/>
@@ -17437,386 +17428,7 @@
           <a:fontRef idx="minor"/>
         </p:style>
         <p:txBody>
-          <a:bodyPr lIns="90000" tIns="45000" rIns="90000" bIns="45000" anchor="ctr">
-            <a:noAutofit/>
-          </a:bodyPr>
-          <a:lstStyle/>
-          <a:p>
-            <a:pPr algn="ctr">
-              <a:lnSpc>
-                <a:spcPct val="100000"/>
-              </a:lnSpc>
-            </a:pPr>
-            <a:endParaRPr lang="en-US" sz="1800" b="0" strike="noStrike" spc="-1">
-              <a:solidFill>
-                <a:schemeClr val="lt1"/>
-              </a:solidFill>
-              <a:latin typeface="Calibri"/>
-              <a:ea typeface="DejaVu Sans"/>
-            </a:endParaRPr>
-          </a:p>
-        </p:txBody>
-      </p:sp>
-      <p:sp>
-        <p:nvSpPr>
-          <p:cNvPr id="287" name="Скругленный прямоугольник 5">
-            <a:extLst>
-              <a:ext uri="{FF2B5EF4-FFF2-40B4-BE49-F238E27FC236}">
-                <a16:creationId xmlns:a16="http://schemas.microsoft.com/office/drawing/2014/main" id="{C070E1C7-C235-D6AA-A771-CF3F6FD9B2C4}"/>
-              </a:ext>
-            </a:extLst>
-          </p:cNvPr>
-          <p:cNvSpPr/>
-          <p:nvPr/>
-        </p:nvSpPr>
-        <p:spPr>
-          <a:xfrm>
-            <a:off x="1247040" y="2203920"/>
-            <a:ext cx="7571880" cy="1288800"/>
-          </a:xfrm>
-          <a:prstGeom prst="roundRect">
-            <a:avLst>
-              <a:gd name="adj" fmla="val 8485"/>
-            </a:avLst>
-          </a:prstGeom>
-          <a:solidFill>
-            <a:schemeClr val="bg1"/>
-          </a:solidFill>
-          <a:ln>
-            <a:noFill/>
-          </a:ln>
-        </p:spPr>
-        <p:style>
-          <a:lnRef idx="2">
-            <a:schemeClr val="accent1">
-              <a:shade val="15000"/>
-            </a:schemeClr>
-          </a:lnRef>
-          <a:fillRef idx="1">
-            <a:schemeClr val="accent1"/>
-          </a:fillRef>
-          <a:effectRef idx="0">
-            <a:schemeClr val="accent1"/>
-          </a:effectRef>
-          <a:fontRef idx="minor"/>
-        </p:style>
-        <p:txBody>
-          <a:bodyPr lIns="90000" tIns="45000" rIns="90000" bIns="45000" anchor="ctr">
-            <a:noAutofit/>
-          </a:bodyPr>
-          <a:lstStyle/>
-          <a:p>
-            <a:pPr algn="ctr">
-              <a:lnSpc>
-                <a:spcPct val="100000"/>
-              </a:lnSpc>
-            </a:pPr>
-            <a:endParaRPr lang="en-US" sz="1800" b="0" strike="noStrike" spc="-1">
-              <a:solidFill>
-                <a:schemeClr val="lt1"/>
-              </a:solidFill>
-              <a:latin typeface="Calibri"/>
-              <a:ea typeface="DejaVu Sans"/>
-            </a:endParaRPr>
-          </a:p>
-        </p:txBody>
-      </p:sp>
-      <p:sp>
-        <p:nvSpPr>
-          <p:cNvPr id="288" name="Текст 21">
-            <a:extLst>
-              <a:ext uri="{FF2B5EF4-FFF2-40B4-BE49-F238E27FC236}">
-                <a16:creationId xmlns:a16="http://schemas.microsoft.com/office/drawing/2014/main" id="{D877BB40-B46B-B498-6849-91B37106148D}"/>
-              </a:ext>
-            </a:extLst>
-          </p:cNvPr>
-          <p:cNvSpPr/>
-          <p:nvPr/>
-        </p:nvSpPr>
-        <p:spPr>
-          <a:xfrm>
-            <a:off x="1980380" y="2585076"/>
-            <a:ext cx="5981400" cy="226440"/>
-          </a:xfrm>
-          <a:prstGeom prst="rect">
-            <a:avLst/>
-          </a:prstGeom>
-          <a:noFill/>
-          <a:ln w="12700">
-            <a:noFill/>
-          </a:ln>
-        </p:spPr>
-        <p:style>
-          <a:lnRef idx="0">
-            <a:scrgbClr r="0" g="0" b="0"/>
-          </a:lnRef>
-          <a:fillRef idx="0">
-            <a:scrgbClr r="0" g="0" b="0"/>
-          </a:fillRef>
-          <a:effectRef idx="0">
-            <a:scrgbClr r="0" g="0" b="0"/>
-          </a:effectRef>
-          <a:fontRef idx="minor"/>
-        </p:style>
-        <p:txBody>
-          <a:bodyPr lIns="0" tIns="0" rIns="0" bIns="0" anchor="t">
-            <a:noAutofit/>
-          </a:bodyPr>
-          <a:lstStyle/>
-          <a:p>
-            <a:pPr algn="ctr">
-              <a:lnSpc>
-                <a:spcPts val="4000"/>
-              </a:lnSpc>
-              <a:tabLst>
-                <a:tab pos="0" algn="l"/>
-              </a:tabLst>
-            </a:pPr>
-            <a:r>
-              <a:rPr lang="ru-RU" sz="3600" b="1" strike="noStrike" spc="-1" dirty="0">
-                <a:solidFill>
-                  <a:srgbClr val="000000"/>
-                </a:solidFill>
-                <a:latin typeface="Inter SemiBold"/>
-                <a:ea typeface="Inter SemiBold"/>
-              </a:rPr>
-              <a:t>Подсчет результатов</a:t>
-            </a:r>
-            <a:r>
-              <a:rPr lang="en-US" sz="3600" b="1" strike="noStrike" spc="-1" dirty="0">
-                <a:solidFill>
-                  <a:srgbClr val="000000"/>
-                </a:solidFill>
-                <a:latin typeface="Inter SemiBold"/>
-                <a:ea typeface="Inter SemiBold"/>
-              </a:rPr>
-              <a:t>:</a:t>
-            </a:r>
-            <a:r>
-              <a:rPr lang="ru-RU" sz="3600" b="1" strike="noStrike" spc="-1" dirty="0">
-                <a:solidFill>
-                  <a:srgbClr val="000000"/>
-                </a:solidFill>
-                <a:latin typeface="Inter SemiBold"/>
-                <a:ea typeface="Inter SemiBold"/>
-              </a:rPr>
-              <a:t> </a:t>
-            </a:r>
-            <a:endParaRPr lang="ru-RU" sz="3600" b="0" strike="noStrike" spc="-1" dirty="0">
-              <a:solidFill>
-                <a:srgbClr val="FFFFFF"/>
-              </a:solidFill>
-              <a:latin typeface="Arial"/>
-            </a:endParaRPr>
-          </a:p>
-          <a:p>
-            <a:pPr algn="ctr">
-              <a:lnSpc>
-                <a:spcPts val="4000"/>
-              </a:lnSpc>
-              <a:tabLst>
-                <a:tab pos="0" algn="l"/>
-              </a:tabLst>
-            </a:pPr>
-            <a:endParaRPr lang="ru-RU" sz="3600" b="0" strike="noStrike" spc="-1" dirty="0">
-              <a:solidFill>
-                <a:srgbClr val="FFFFFF"/>
-              </a:solidFill>
-              <a:latin typeface="Arial"/>
-            </a:endParaRPr>
-          </a:p>
-        </p:txBody>
-      </p:sp>
-      <p:sp>
-        <p:nvSpPr>
-          <p:cNvPr id="289" name="Текст 21">
-            <a:extLst>
-              <a:ext uri="{FF2B5EF4-FFF2-40B4-BE49-F238E27FC236}">
-                <a16:creationId xmlns:a16="http://schemas.microsoft.com/office/drawing/2014/main" id="{50AC97A0-E4C9-D84D-744C-BC8E5E3A3028}"/>
-              </a:ext>
-            </a:extLst>
-          </p:cNvPr>
-          <p:cNvSpPr/>
-          <p:nvPr/>
-        </p:nvSpPr>
-        <p:spPr>
-          <a:xfrm rot="21576000">
-            <a:off x="10699920" y="2561039"/>
-            <a:ext cx="6385320" cy="574560"/>
-          </a:xfrm>
-          <a:prstGeom prst="rect">
-            <a:avLst/>
-          </a:prstGeom>
-          <a:noFill/>
-          <a:ln w="12700">
-            <a:noFill/>
-          </a:ln>
-        </p:spPr>
-        <p:style>
-          <a:lnRef idx="0">
-            <a:scrgbClr r="0" g="0" b="0"/>
-          </a:lnRef>
-          <a:fillRef idx="0">
-            <a:scrgbClr r="0" g="0" b="0"/>
-          </a:fillRef>
-          <a:effectRef idx="0">
-            <a:scrgbClr r="0" g="0" b="0"/>
-          </a:effectRef>
-          <a:fontRef idx="minor"/>
-        </p:style>
-        <p:txBody>
-          <a:bodyPr lIns="0" tIns="0" rIns="0" bIns="0" anchor="t">
-            <a:noAutofit/>
-          </a:bodyPr>
-          <a:lstStyle/>
-          <a:p>
-            <a:pPr algn="ctr">
-              <a:lnSpc>
-                <a:spcPts val="4000"/>
-              </a:lnSpc>
-              <a:tabLst>
-                <a:tab pos="0" algn="l"/>
-              </a:tabLst>
-            </a:pPr>
-            <a:r>
-              <a:rPr lang="ru-RU" sz="3600" b="1" spc="-1" dirty="0">
-                <a:solidFill>
-                  <a:srgbClr val="000000"/>
-                </a:solidFill>
-                <a:latin typeface="Inter SemiBold"/>
-              </a:rPr>
-              <a:t>Окно в процессе игры</a:t>
-            </a:r>
-            <a:r>
-              <a:rPr lang="en-US" sz="3600" b="1" spc="-1" dirty="0">
-                <a:solidFill>
-                  <a:srgbClr val="000000"/>
-                </a:solidFill>
-                <a:latin typeface="Inter SemiBold"/>
-              </a:rPr>
-              <a:t>:</a:t>
-            </a:r>
-            <a:endParaRPr lang="ru-RU" sz="3600" b="0" strike="noStrike" spc="-1" dirty="0">
-              <a:solidFill>
-                <a:srgbClr val="FFFFFF"/>
-              </a:solidFill>
-              <a:latin typeface="Arial"/>
-            </a:endParaRPr>
-          </a:p>
-        </p:txBody>
-      </p:sp>
-      <p:sp>
-        <p:nvSpPr>
-          <p:cNvPr id="290" name="Номер слайда 1">
-            <a:extLst>
-              <a:ext uri="{FF2B5EF4-FFF2-40B4-BE49-F238E27FC236}">
-                <a16:creationId xmlns:a16="http://schemas.microsoft.com/office/drawing/2014/main" id="{433AB3DC-237E-5F8F-44CD-C60B5D34BC43}"/>
-              </a:ext>
-            </a:extLst>
-          </p:cNvPr>
-          <p:cNvSpPr/>
-          <p:nvPr/>
-        </p:nvSpPr>
-        <p:spPr>
-          <a:xfrm>
-            <a:off x="18410400" y="10492560"/>
-            <a:ext cx="1067400" cy="424800"/>
-          </a:xfrm>
-          <a:prstGeom prst="rect">
-            <a:avLst/>
-          </a:prstGeom>
-          <a:noFill/>
-          <a:ln w="0">
-            <a:noFill/>
-          </a:ln>
-        </p:spPr>
-        <p:style>
-          <a:lnRef idx="0">
-            <a:scrgbClr r="0" g="0" b="0"/>
-          </a:lnRef>
-          <a:fillRef idx="0">
-            <a:scrgbClr r="0" g="0" b="0"/>
-          </a:fillRef>
-          <a:effectRef idx="0">
-            <a:scrgbClr r="0" g="0" b="0"/>
-          </a:effectRef>
-          <a:fontRef idx="minor"/>
-        </p:style>
-        <p:txBody>
-          <a:bodyPr lIns="90000" tIns="45000" rIns="90000" bIns="45000" anchor="t">
-            <a:noAutofit/>
-          </a:bodyPr>
-          <a:lstStyle/>
-          <a:p>
-            <a:pPr algn="r">
-              <a:lnSpc>
-                <a:spcPct val="100000"/>
-              </a:lnSpc>
-            </a:pPr>
-            <a:fld id="{36D669ED-9585-4D50-B7E1-3E4693C94A2D}" type="slidenum">
-              <a:rPr lang="ru-RU" sz="1600" b="0" strike="noStrike" spc="-1">
-                <a:solidFill>
-                  <a:schemeClr val="accent6"/>
-                </a:solidFill>
-                <a:latin typeface="Inter"/>
-                <a:ea typeface="Inter"/>
-              </a:rPr>
-              <a:t>10</a:t>
-            </a:fld>
-            <a:endParaRPr lang="ru-RU" sz="1600" b="0" strike="noStrike" spc="-1">
-              <a:solidFill>
-                <a:srgbClr val="FFFFFF"/>
-              </a:solidFill>
-              <a:latin typeface="Arial"/>
-            </a:endParaRPr>
-          </a:p>
-        </p:txBody>
-      </p:sp>
-      <p:sp>
-        <p:nvSpPr>
-          <p:cNvPr id="291" name="Скругленный прямоугольник 9">
-            <a:extLst>
-              <a:ext uri="{FF2B5EF4-FFF2-40B4-BE49-F238E27FC236}">
-                <a16:creationId xmlns:a16="http://schemas.microsoft.com/office/drawing/2014/main" id="{F63D0FAC-9D6B-D07E-EC1D-161100E04A51}"/>
-              </a:ext>
-            </a:extLst>
-          </p:cNvPr>
-          <p:cNvSpPr/>
-          <p:nvPr/>
-        </p:nvSpPr>
-        <p:spPr>
-          <a:xfrm>
-            <a:off x="1247040" y="361440"/>
-            <a:ext cx="16571880" cy="885600"/>
-          </a:xfrm>
-          <a:prstGeom prst="roundRect">
-            <a:avLst>
-              <a:gd name="adj" fmla="val 30536"/>
-            </a:avLst>
-          </a:prstGeom>
-          <a:solidFill>
-            <a:srgbClr val="FFDD2D"/>
-          </a:solidFill>
-          <a:ln>
-            <a:noFill/>
-          </a:ln>
-        </p:spPr>
-        <p:style>
-          <a:lnRef idx="2">
-            <a:schemeClr val="accent1">
-              <a:shade val="15000"/>
-            </a:schemeClr>
-          </a:lnRef>
-          <a:fillRef idx="1">
-            <a:schemeClr val="accent1"/>
-          </a:fillRef>
-          <a:effectRef idx="0">
-            <a:schemeClr val="accent1"/>
-          </a:effectRef>
-          <a:fontRef idx="minor"/>
-        </p:style>
-        <p:txBody>
-          <a:bodyPr lIns="288000" tIns="0" rIns="288000" bIns="0" anchor="ctr">
+          <a:bodyPr lIns="288000" tIns="0" rIns="288000" bIns="0" anchor="b">
             <a:noAutofit/>
           </a:bodyPr>
           <a:lstStyle/>
@@ -17827,26 +17439,36 @@
               </a:lnSpc>
             </a:pPr>
             <a:r>
-              <a:rPr lang="ru-RU" sz="6000" b="1" strike="noStrike" spc="-1" dirty="0">
+              <a:rPr lang="ru-RU" sz="4200" b="1" strike="noStrike" spc="-1" dirty="0">
                 <a:solidFill>
                   <a:srgbClr val="00402E"/>
                 </a:solidFill>
                 <a:latin typeface="Inter SemiBold"/>
                 <a:ea typeface="Inter SemiBold"/>
               </a:rPr>
-              <a:t>Геймплей игры </a:t>
+              <a:t>Технологии, которые использовались в </a:t>
             </a:r>
             <a:r>
-              <a:rPr lang="en-US" sz="6000" b="1" spc="-1" dirty="0">
+              <a:rPr lang="ru-RU" sz="4200" b="1" spc="-1" dirty="0">
                 <a:solidFill>
                   <a:srgbClr val="00402E"/>
                 </a:solidFill>
                 <a:latin typeface="Inter SemiBold"/>
                 <a:ea typeface="Inter SemiBold"/>
               </a:rPr>
-              <a:t>Snake</a:t>
+              <a:t>нашем</a:t>
             </a:r>
-            <a:endParaRPr lang="ru-RU" sz="6000" b="0" strike="noStrike" spc="-1" dirty="0">
+            <a:r>
+              <a:rPr lang="ru-RU" sz="4200" b="1" strike="noStrike" spc="-1" dirty="0">
+                <a:solidFill>
+                  <a:srgbClr val="00402E"/>
+                </a:solidFill>
+                <a:latin typeface="Inter SemiBold"/>
+                <a:ea typeface="Inter SemiBold"/>
+              </a:rPr>
+              <a:t> проекте</a:t>
+            </a:r>
+            <a:endParaRPr lang="ru-RU" sz="4200" b="0" strike="noStrike" spc="-1" dirty="0">
               <a:solidFill>
                 <a:srgbClr val="000000"/>
               </a:solidFill>
@@ -17855,12 +17477,100 @@
           </a:p>
         </p:txBody>
       </p:sp>
+      <p:pic>
+        <p:nvPicPr>
+          <p:cNvPr id="297" name="Рисунок 296"/>
+          <p:cNvPicPr/>
+          <p:nvPr/>
+        </p:nvPicPr>
+        <p:blipFill>
+          <a:blip r:embed="rId2"/>
+          <a:stretch/>
+        </p:blipFill>
+        <p:spPr>
+          <a:xfrm>
+            <a:off x="1080000" y="2160000"/>
+            <a:ext cx="7315200" cy="3844560"/>
+          </a:xfrm>
+          <a:prstGeom prst="rect">
+            <a:avLst/>
+          </a:prstGeom>
+          <a:ln w="0">
+            <a:noFill/>
+          </a:ln>
+        </p:spPr>
+      </p:pic>
+      <p:pic>
+        <p:nvPicPr>
+          <p:cNvPr id="299" name="Рисунок 298"/>
+          <p:cNvPicPr/>
+          <p:nvPr/>
+        </p:nvPicPr>
+        <p:blipFill>
+          <a:blip r:embed="rId3"/>
+          <a:stretch/>
+        </p:blipFill>
+        <p:spPr>
+          <a:xfrm>
+            <a:off x="6248400" y="6827687"/>
+            <a:ext cx="6650520" cy="3482400"/>
+          </a:xfrm>
+          <a:prstGeom prst="rect">
+            <a:avLst/>
+          </a:prstGeom>
+          <a:ln w="0">
+            <a:noFill/>
+          </a:ln>
+        </p:spPr>
+      </p:pic>
+      <p:pic>
+        <p:nvPicPr>
+          <p:cNvPr id="1028" name="Picture 4" descr="Picture background">
+            <a:extLst>
+              <a:ext uri="{FF2B5EF4-FFF2-40B4-BE49-F238E27FC236}">
+                <a16:creationId xmlns:a16="http://schemas.microsoft.com/office/drawing/2014/main" id="{5B3D635D-C97F-DA28-305F-B7364A41F242}"/>
+              </a:ext>
+            </a:extLst>
+          </p:cNvPr>
+          <p:cNvPicPr>
+            <a:picLocks noChangeAspect="1" noChangeArrowheads="1"/>
+          </p:cNvPicPr>
+          <p:nvPr/>
+        </p:nvPicPr>
+        <p:blipFill>
+          <a:blip r:embed="rId4">
+            <a:extLst>
+              <a:ext uri="{28A0092B-C50C-407E-A947-70E740481C1C}">
+                <a14:useLocalDpi xmlns:a14="http://schemas.microsoft.com/office/drawing/2010/main" val="0"/>
+              </a:ext>
+            </a:extLst>
+          </a:blip>
+          <a:srcRect/>
+          <a:stretch>
+            <a:fillRect/>
+          </a:stretch>
+        </p:blipFill>
+        <p:spPr bwMode="auto">
+          <a:xfrm>
+            <a:off x="10940280" y="2082767"/>
+            <a:ext cx="6951480" cy="3921793"/>
+          </a:xfrm>
+          <a:prstGeom prst="rect">
+            <a:avLst/>
+          </a:prstGeom>
+          <a:noFill/>
+          <a:extLst>
+            <a:ext uri="{909E8E84-426E-40DD-AFC4-6F175D3DCCD1}">
+              <a14:hiddenFill xmlns:a14="http://schemas.microsoft.com/office/drawing/2010/main">
+                <a:solidFill>
+                  <a:srgbClr val="FFFFFF"/>
+                </a:solidFill>
+              </a14:hiddenFill>
+            </a:ext>
+          </a:extLst>
+        </p:spPr>
+      </p:pic>
     </p:spTree>
-    <p:extLst>
-      <p:ext uri="{BB962C8B-B14F-4D97-AF65-F5344CB8AC3E}">
-        <p14:creationId xmlns:p14="http://schemas.microsoft.com/office/powerpoint/2010/main" val="258908993"/>
-      </p:ext>
-    </p:extLst>
   </p:cSld>
   <p:clrMapOvr>
     <a:masterClrMapping/>
@@ -17895,22 +17605,22 @@
       </p:grpSpPr>
       <p:sp>
         <p:nvSpPr>
-          <p:cNvPr id="294" name="Скругленный прямоугольник 7"/>
+          <p:cNvPr id="300" name="Скругленный прямоугольник 5"/>
           <p:cNvSpPr/>
           <p:nvPr/>
         </p:nvSpPr>
         <p:spPr>
           <a:xfrm>
-            <a:off x="1247040" y="361440"/>
-            <a:ext cx="16571880" cy="885600"/>
+            <a:off x="2759040" y="2520000"/>
+            <a:ext cx="14160240" cy="6949800"/>
           </a:xfrm>
           <a:prstGeom prst="roundRect">
             <a:avLst>
-              <a:gd name="adj" fmla="val 30536"/>
+              <a:gd name="adj" fmla="val 6364"/>
             </a:avLst>
           </a:prstGeom>
           <a:solidFill>
-            <a:srgbClr val="FFDD2D"/>
+            <a:schemeClr val="bg1"/>
           </a:solidFill>
           <a:ln>
             <a:noFill/>
@@ -17931,12 +17641,222 @@
           <a:fontRef idx="minor"/>
         </p:style>
         <p:txBody>
+          <a:bodyPr lIns="90000" tIns="45000" rIns="90000" bIns="45000" anchor="ctr">
+            <a:noAutofit/>
+          </a:bodyPr>
+          <a:lstStyle/>
+          <a:p>
+            <a:pPr>
+              <a:lnSpc>
+                <a:spcPts val="3399"/>
+              </a:lnSpc>
+              <a:spcBef>
+                <a:spcPts val="2401"/>
+              </a:spcBef>
+              <a:tabLst>
+                <a:tab pos="0" algn="l"/>
+              </a:tabLst>
+            </a:pPr>
+            <a:endParaRPr lang="ru-RU" sz="2600" b="0" strike="noStrike" spc="-1">
+              <a:solidFill>
+                <a:srgbClr val="000000"/>
+              </a:solidFill>
+              <a:latin typeface="Arial"/>
+            </a:endParaRPr>
+          </a:p>
+          <a:p>
+            <a:pPr>
+              <a:lnSpc>
+                <a:spcPts val="3399"/>
+              </a:lnSpc>
+              <a:spcBef>
+                <a:spcPts val="2401"/>
+              </a:spcBef>
+              <a:tabLst>
+                <a:tab pos="0" algn="l"/>
+              </a:tabLst>
+            </a:pPr>
+            <a:endParaRPr lang="ru-RU" sz="2600" b="0" strike="noStrike" spc="-1">
+              <a:solidFill>
+                <a:srgbClr val="000000"/>
+              </a:solidFill>
+              <a:latin typeface="Arial"/>
+            </a:endParaRPr>
+          </a:p>
+        </p:txBody>
+      </p:sp>
+      <p:sp>
+        <p:nvSpPr>
+          <p:cNvPr id="301" name="Текст 10"/>
+          <p:cNvSpPr/>
+          <p:nvPr/>
+        </p:nvSpPr>
+        <p:spPr>
+          <a:xfrm>
+            <a:off x="3420000" y="3060000"/>
+            <a:ext cx="12803400" cy="5939280"/>
+          </a:xfrm>
+          <a:prstGeom prst="rect">
+            <a:avLst/>
+          </a:prstGeom>
+          <a:noFill/>
+          <a:ln w="0">
+            <a:noFill/>
+          </a:ln>
+        </p:spPr>
+        <p:style>
+          <a:lnRef idx="0">
+            <a:scrgbClr r="0" g="0" b="0"/>
+          </a:lnRef>
+          <a:fillRef idx="0">
+            <a:scrgbClr r="0" g="0" b="0"/>
+          </a:fillRef>
+          <a:effectRef idx="0">
+            <a:scrgbClr r="0" g="0" b="0"/>
+          </a:effectRef>
+          <a:fontRef idx="minor"/>
+        </p:style>
+        <p:txBody>
+          <a:bodyPr lIns="0" tIns="0" rIns="0" bIns="0" anchor="ctr">
+            <a:noAutofit/>
+          </a:bodyPr>
+          <a:lstStyle/>
+          <a:p>
+            <a:pPr>
+              <a:lnSpc>
+                <a:spcPts val="3399"/>
+              </a:lnSpc>
+              <a:spcBef>
+                <a:spcPts val="2401"/>
+              </a:spcBef>
+              <a:tabLst>
+                <a:tab pos="0" algn="l"/>
+              </a:tabLst>
+            </a:pPr>
+            <a:r>
+              <a:rPr lang="ru-RU" sz="4200" b="1" strike="noStrike" spc="-1" dirty="0">
+                <a:solidFill>
+                  <a:srgbClr val="1A1919"/>
+                </a:solidFill>
+                <a:latin typeface="Inter"/>
+                <a:ea typeface="Inter"/>
+              </a:rPr>
+              <a:t>Мы считаем, что все поставленные задачи выполнены.</a:t>
+            </a:r>
+            <a:endParaRPr lang="ru-RU" sz="4400" b="0" strike="noStrike" spc="-1" dirty="0">
+              <a:solidFill>
+                <a:srgbClr val="FFFFFF"/>
+              </a:solidFill>
+              <a:latin typeface="Arial"/>
+            </a:endParaRPr>
+          </a:p>
+        </p:txBody>
+      </p:sp>
+      <p:sp>
+        <p:nvSpPr>
+          <p:cNvPr id="302" name="Номер слайда 1"/>
+          <p:cNvSpPr/>
+          <p:nvPr/>
+        </p:nvSpPr>
+        <p:spPr>
+          <a:xfrm>
+            <a:off x="18410400" y="10492560"/>
+            <a:ext cx="1067400" cy="424800"/>
+          </a:xfrm>
+          <a:prstGeom prst="rect">
+            <a:avLst/>
+          </a:prstGeom>
+          <a:noFill/>
+          <a:ln w="0">
+            <a:noFill/>
+          </a:ln>
+        </p:spPr>
+        <p:style>
+          <a:lnRef idx="0">
+            <a:scrgbClr r="0" g="0" b="0"/>
+          </a:lnRef>
+          <a:fillRef idx="0">
+            <a:scrgbClr r="0" g="0" b="0"/>
+          </a:fillRef>
+          <a:effectRef idx="0">
+            <a:scrgbClr r="0" g="0" b="0"/>
+          </a:effectRef>
+          <a:fontRef idx="minor"/>
+        </p:style>
+        <p:txBody>
+          <a:bodyPr lIns="90000" tIns="45000" rIns="90000" bIns="45000" anchor="t">
+            <a:noAutofit/>
+          </a:bodyPr>
+          <a:lstStyle/>
+          <a:p>
+            <a:pPr algn="r">
+              <a:lnSpc>
+                <a:spcPct val="100000"/>
+              </a:lnSpc>
+            </a:pPr>
+            <a:fld id="{E8407119-05B5-4FA1-8BCF-4A74A3384988}" type="slidenum">
+              <a:rPr lang="ru-RU" sz="1600" b="0" strike="noStrike" spc="-1">
+                <a:solidFill>
+                  <a:schemeClr val="accent6"/>
+                </a:solidFill>
+                <a:latin typeface="Inter"/>
+                <a:ea typeface="Inter"/>
+              </a:rPr>
+              <a:t>11</a:t>
+            </a:fld>
+            <a:endParaRPr lang="ru-RU" sz="1600" b="0" strike="noStrike" spc="-1">
+              <a:solidFill>
+                <a:srgbClr val="FFFFFF"/>
+              </a:solidFill>
+              <a:latin typeface="Arial"/>
+            </a:endParaRPr>
+          </a:p>
+        </p:txBody>
+      </p:sp>
+      <p:sp>
+        <p:nvSpPr>
+          <p:cNvPr id="303" name="Скругленный прямоугольник 1"/>
+          <p:cNvSpPr/>
+          <p:nvPr/>
+        </p:nvSpPr>
+        <p:spPr>
+          <a:xfrm>
+            <a:off x="2818800" y="798840"/>
+            <a:ext cx="14160240" cy="1618560"/>
+          </a:xfrm>
+          <a:prstGeom prst="roundRect">
+            <a:avLst>
+              <a:gd name="adj" fmla="val 30536"/>
+            </a:avLst>
+          </a:prstGeom>
+          <a:solidFill>
+            <a:srgbClr val="FFDD2D"/>
+          </a:solidFill>
+          <a:ln>
+            <a:noFill/>
+          </a:ln>
+        </p:spPr>
+        <p:style>
+          <a:lnRef idx="2">
+            <a:schemeClr val="accent1">
+              <a:shade val="15000"/>
+            </a:schemeClr>
+          </a:lnRef>
+          <a:fillRef idx="1">
+            <a:schemeClr val="accent1"/>
+          </a:fillRef>
+          <a:effectRef idx="0">
+            <a:schemeClr val="accent1"/>
+          </a:effectRef>
+          <a:fontRef idx="minor"/>
+        </p:style>
+        <p:txBody>
           <a:bodyPr lIns="288000" tIns="0" rIns="288000" bIns="0" anchor="ctr">
             <a:noAutofit/>
           </a:bodyPr>
           <a:lstStyle/>
           <a:p>
-            <a:pPr algn="ctr">
+            <a:pPr>
               <a:lnSpc>
                 <a:spcPts val="6999"/>
               </a:lnSpc>
@@ -17949,7 +17869,7 @@
                 <a:latin typeface="Inter SemiBold"/>
                 <a:ea typeface="Inter SemiBold"/>
               </a:rPr>
-              <a:t>База данных и её таблицы</a:t>
+              <a:t>Заключение</a:t>
             </a:r>
             <a:endParaRPr lang="ru-RU" sz="6000" b="0" strike="noStrike" spc="-1">
               <a:solidFill>
@@ -17995,309 +17915,14 @@
       </p:grpSpPr>
       <p:sp>
         <p:nvSpPr>
-          <p:cNvPr id="296" name="Скругленный прямоугольник 8"/>
+          <p:cNvPr id="304" name="Номер слайда 1"/>
           <p:cNvSpPr/>
           <p:nvPr/>
         </p:nvSpPr>
         <p:spPr>
           <a:xfrm>
-            <a:off x="1080000" y="374040"/>
-            <a:ext cx="17458920" cy="885600"/>
-          </a:xfrm>
-          <a:prstGeom prst="roundRect">
-            <a:avLst>
-              <a:gd name="adj" fmla="val 30536"/>
-            </a:avLst>
-          </a:prstGeom>
-          <a:solidFill>
-            <a:srgbClr val="FFDD2D"/>
-          </a:solidFill>
-          <a:ln>
-            <a:noFill/>
-          </a:ln>
-        </p:spPr>
-        <p:style>
-          <a:lnRef idx="2">
-            <a:schemeClr val="accent1">
-              <a:shade val="15000"/>
-            </a:schemeClr>
-          </a:lnRef>
-          <a:fillRef idx="1">
-            <a:schemeClr val="accent1"/>
-          </a:fillRef>
-          <a:effectRef idx="0">
-            <a:schemeClr val="accent1"/>
-          </a:effectRef>
-          <a:fontRef idx="minor"/>
-        </p:style>
-        <p:txBody>
-          <a:bodyPr lIns="288000" tIns="0" rIns="288000" bIns="0" anchor="b">
-            <a:noAutofit/>
-          </a:bodyPr>
-          <a:lstStyle/>
-          <a:p>
-            <a:pPr algn="ctr">
-              <a:lnSpc>
-                <a:spcPts val="6999"/>
-              </a:lnSpc>
-            </a:pPr>
-            <a:r>
-              <a:rPr lang="ru-RU" sz="4200" b="1" strike="noStrike" spc="-1" dirty="0">
-                <a:solidFill>
-                  <a:srgbClr val="00402E"/>
-                </a:solidFill>
-                <a:latin typeface="Inter SemiBold"/>
-                <a:ea typeface="Inter SemiBold"/>
-              </a:rPr>
-              <a:t>Технологии, которые использовались в </a:t>
-            </a:r>
-            <a:r>
-              <a:rPr lang="ru-RU" sz="4200" b="1" spc="-1" dirty="0">
-                <a:solidFill>
-                  <a:srgbClr val="00402E"/>
-                </a:solidFill>
-                <a:latin typeface="Inter SemiBold"/>
-                <a:ea typeface="Inter SemiBold"/>
-              </a:rPr>
-              <a:t>нашем</a:t>
-            </a:r>
-            <a:r>
-              <a:rPr lang="ru-RU" sz="4200" b="1" strike="noStrike" spc="-1" dirty="0">
-                <a:solidFill>
-                  <a:srgbClr val="00402E"/>
-                </a:solidFill>
-                <a:latin typeface="Inter SemiBold"/>
-                <a:ea typeface="Inter SemiBold"/>
-              </a:rPr>
-              <a:t> проекте</a:t>
-            </a:r>
-            <a:endParaRPr lang="ru-RU" sz="4200" b="0" strike="noStrike" spc="-1" dirty="0">
-              <a:solidFill>
-                <a:srgbClr val="000000"/>
-              </a:solidFill>
-              <a:latin typeface="Arial"/>
-            </a:endParaRPr>
-          </a:p>
-        </p:txBody>
-      </p:sp>
-      <p:pic>
-        <p:nvPicPr>
-          <p:cNvPr id="297" name="Рисунок 296"/>
-          <p:cNvPicPr/>
-          <p:nvPr/>
-        </p:nvPicPr>
-        <p:blipFill>
-          <a:blip r:embed="rId2"/>
-          <a:stretch/>
-        </p:blipFill>
-        <p:spPr>
-          <a:xfrm>
-            <a:off x="1080000" y="2160000"/>
-            <a:ext cx="7315200" cy="3844560"/>
-          </a:xfrm>
-          <a:prstGeom prst="rect">
-            <a:avLst/>
-          </a:prstGeom>
-          <a:ln w="0">
-            <a:noFill/>
-          </a:ln>
-        </p:spPr>
-      </p:pic>
-      <p:pic>
-        <p:nvPicPr>
-          <p:cNvPr id="299" name="Рисунок 298"/>
-          <p:cNvPicPr/>
-          <p:nvPr/>
-        </p:nvPicPr>
-        <p:blipFill>
-          <a:blip r:embed="rId3"/>
-          <a:stretch/>
-        </p:blipFill>
-        <p:spPr>
-          <a:xfrm>
-            <a:off x="6248400" y="6827687"/>
-            <a:ext cx="6650520" cy="3482400"/>
-          </a:xfrm>
-          <a:prstGeom prst="rect">
-            <a:avLst/>
-          </a:prstGeom>
-          <a:ln w="0">
-            <a:noFill/>
-          </a:ln>
-        </p:spPr>
-      </p:pic>
-      <p:pic>
-        <p:nvPicPr>
-          <p:cNvPr id="1028" name="Picture 4" descr="Picture background">
-            <a:extLst>
-              <a:ext uri="{FF2B5EF4-FFF2-40B4-BE49-F238E27FC236}">
-                <a16:creationId xmlns:a16="http://schemas.microsoft.com/office/drawing/2014/main" id="{5B3D635D-C97F-DA28-305F-B7364A41F242}"/>
-              </a:ext>
-            </a:extLst>
-          </p:cNvPr>
-          <p:cNvPicPr>
-            <a:picLocks noChangeAspect="1" noChangeArrowheads="1"/>
-          </p:cNvPicPr>
-          <p:nvPr/>
-        </p:nvPicPr>
-        <p:blipFill>
-          <a:blip r:embed="rId4">
-            <a:extLst>
-              <a:ext uri="{28A0092B-C50C-407E-A947-70E740481C1C}">
-                <a14:useLocalDpi xmlns:a14="http://schemas.microsoft.com/office/drawing/2010/main" val="0"/>
-              </a:ext>
-            </a:extLst>
-          </a:blip>
-          <a:srcRect/>
-          <a:stretch>
-            <a:fillRect/>
-          </a:stretch>
-        </p:blipFill>
-        <p:spPr bwMode="auto">
-          <a:xfrm>
-            <a:off x="10940280" y="2082767"/>
-            <a:ext cx="6951480" cy="3921793"/>
-          </a:xfrm>
-          <a:prstGeom prst="rect">
-            <a:avLst/>
-          </a:prstGeom>
-          <a:noFill/>
-          <a:extLst>
-            <a:ext uri="{909E8E84-426E-40DD-AFC4-6F175D3DCCD1}">
-              <a14:hiddenFill xmlns:a14="http://schemas.microsoft.com/office/drawing/2010/main">
-                <a:solidFill>
-                  <a:srgbClr val="FFFFFF"/>
-                </a:solidFill>
-              </a14:hiddenFill>
-            </a:ext>
-          </a:extLst>
-        </p:spPr>
-      </p:pic>
-    </p:spTree>
-  </p:cSld>
-  <p:clrMapOvr>
-    <a:masterClrMapping/>
-  </p:clrMapOvr>
-</p:sld>
-</file>
-
-<file path=ppt/slides/slide13.xml><?xml version="1.0" encoding="utf-8"?>
-<p:sld xmlns:a="http://schemas.openxmlformats.org/drawingml/2006/main" xmlns:r="http://schemas.openxmlformats.org/officeDocument/2006/relationships" xmlns:p="http://schemas.openxmlformats.org/presentationml/2006/main">
-  <p:cSld>
-    <p:bg>
-      <p:bgPr>
-        <a:solidFill>
-          <a:srgbClr val="00402E"/>
-        </a:solidFill>
-        <a:effectLst/>
-      </p:bgPr>
-    </p:bg>
-    <p:spTree>
-      <p:nvGrpSpPr>
-        <p:cNvPr id="1" name=""/>
-        <p:cNvGrpSpPr/>
-        <p:nvPr/>
-      </p:nvGrpSpPr>
-      <p:grpSpPr>
-        <a:xfrm>
-          <a:off x="0" y="0"/>
-          <a:ext cx="0" cy="0"/>
-          <a:chOff x="0" y="0"/>
-          <a:chExt cx="0" cy="0"/>
-        </a:xfrm>
-      </p:grpSpPr>
-      <p:sp>
-        <p:nvSpPr>
-          <p:cNvPr id="300" name="Скругленный прямоугольник 5"/>
-          <p:cNvSpPr/>
-          <p:nvPr/>
-        </p:nvSpPr>
-        <p:spPr>
-          <a:xfrm>
-            <a:off x="2759040" y="2520000"/>
-            <a:ext cx="14160240" cy="6949800"/>
-          </a:xfrm>
-          <a:prstGeom prst="roundRect">
-            <a:avLst>
-              <a:gd name="adj" fmla="val 6364"/>
-            </a:avLst>
-          </a:prstGeom>
-          <a:solidFill>
-            <a:schemeClr val="bg1"/>
-          </a:solidFill>
-          <a:ln>
-            <a:noFill/>
-          </a:ln>
-        </p:spPr>
-        <p:style>
-          <a:lnRef idx="2">
-            <a:schemeClr val="accent1">
-              <a:shade val="15000"/>
-            </a:schemeClr>
-          </a:lnRef>
-          <a:fillRef idx="1">
-            <a:schemeClr val="accent1"/>
-          </a:fillRef>
-          <a:effectRef idx="0">
-            <a:schemeClr val="accent1"/>
-          </a:effectRef>
-          <a:fontRef idx="minor"/>
-        </p:style>
-        <p:txBody>
-          <a:bodyPr lIns="90000" tIns="45000" rIns="90000" bIns="45000" anchor="ctr">
-            <a:noAutofit/>
-          </a:bodyPr>
-          <a:lstStyle/>
-          <a:p>
-            <a:pPr>
-              <a:lnSpc>
-                <a:spcPts val="3399"/>
-              </a:lnSpc>
-              <a:spcBef>
-                <a:spcPts val="2401"/>
-              </a:spcBef>
-              <a:tabLst>
-                <a:tab pos="0" algn="l"/>
-              </a:tabLst>
-            </a:pPr>
-            <a:endParaRPr lang="ru-RU" sz="2600" b="0" strike="noStrike" spc="-1">
-              <a:solidFill>
-                <a:srgbClr val="000000"/>
-              </a:solidFill>
-              <a:latin typeface="Arial"/>
-            </a:endParaRPr>
-          </a:p>
-          <a:p>
-            <a:pPr>
-              <a:lnSpc>
-                <a:spcPts val="3399"/>
-              </a:lnSpc>
-              <a:spcBef>
-                <a:spcPts val="2401"/>
-              </a:spcBef>
-              <a:tabLst>
-                <a:tab pos="0" algn="l"/>
-              </a:tabLst>
-            </a:pPr>
-            <a:endParaRPr lang="ru-RU" sz="2600" b="0" strike="noStrike" spc="-1">
-              <a:solidFill>
-                <a:srgbClr val="000000"/>
-              </a:solidFill>
-              <a:latin typeface="Arial"/>
-            </a:endParaRPr>
-          </a:p>
-        </p:txBody>
-      </p:sp>
-      <p:sp>
-        <p:nvSpPr>
-          <p:cNvPr id="301" name="Текст 10"/>
-          <p:cNvSpPr/>
-          <p:nvPr/>
-        </p:nvSpPr>
-        <p:spPr>
-          <a:xfrm>
-            <a:off x="3420000" y="3060000"/>
-            <a:ext cx="12803400" cy="5939280"/>
+            <a:off x="18410400" y="10492560"/>
+            <a:ext cx="1067400" cy="424800"/>
           </a:xfrm>
           <a:prstGeom prst="rect">
             <a:avLst/>
@@ -18320,234 +17945,6 @@
           <a:fontRef idx="minor"/>
         </p:style>
         <p:txBody>
-          <a:bodyPr lIns="0" tIns="0" rIns="0" bIns="0" anchor="ctr">
-            <a:noAutofit/>
-          </a:bodyPr>
-          <a:lstStyle/>
-          <a:p>
-            <a:pPr>
-              <a:lnSpc>
-                <a:spcPts val="3399"/>
-              </a:lnSpc>
-              <a:spcBef>
-                <a:spcPts val="2401"/>
-              </a:spcBef>
-              <a:tabLst>
-                <a:tab pos="0" algn="l"/>
-              </a:tabLst>
-            </a:pPr>
-            <a:r>
-              <a:rPr lang="ru-RU" sz="4200" b="1" strike="noStrike" spc="-1" dirty="0">
-                <a:solidFill>
-                  <a:srgbClr val="1A1919"/>
-                </a:solidFill>
-                <a:latin typeface="Inter"/>
-                <a:ea typeface="Inter"/>
-              </a:rPr>
-              <a:t>Мы считаем, что все поставленные задачи выполнены.</a:t>
-            </a:r>
-            <a:endParaRPr lang="ru-RU" sz="4400" b="0" strike="noStrike" spc="-1" dirty="0">
-              <a:solidFill>
-                <a:srgbClr val="FFFFFF"/>
-              </a:solidFill>
-              <a:latin typeface="Arial"/>
-            </a:endParaRPr>
-          </a:p>
-        </p:txBody>
-      </p:sp>
-      <p:sp>
-        <p:nvSpPr>
-          <p:cNvPr id="302" name="Номер слайда 1"/>
-          <p:cNvSpPr/>
-          <p:nvPr/>
-        </p:nvSpPr>
-        <p:spPr>
-          <a:xfrm>
-            <a:off x="18410400" y="10492560"/>
-            <a:ext cx="1067400" cy="424800"/>
-          </a:xfrm>
-          <a:prstGeom prst="rect">
-            <a:avLst/>
-          </a:prstGeom>
-          <a:noFill/>
-          <a:ln w="0">
-            <a:noFill/>
-          </a:ln>
-        </p:spPr>
-        <p:style>
-          <a:lnRef idx="0">
-            <a:scrgbClr r="0" g="0" b="0"/>
-          </a:lnRef>
-          <a:fillRef idx="0">
-            <a:scrgbClr r="0" g="0" b="0"/>
-          </a:fillRef>
-          <a:effectRef idx="0">
-            <a:scrgbClr r="0" g="0" b="0"/>
-          </a:effectRef>
-          <a:fontRef idx="minor"/>
-        </p:style>
-        <p:txBody>
-          <a:bodyPr lIns="90000" tIns="45000" rIns="90000" bIns="45000" anchor="t">
-            <a:noAutofit/>
-          </a:bodyPr>
-          <a:lstStyle/>
-          <a:p>
-            <a:pPr algn="r">
-              <a:lnSpc>
-                <a:spcPct val="100000"/>
-              </a:lnSpc>
-            </a:pPr>
-            <a:fld id="{E8407119-05B5-4FA1-8BCF-4A74A3384988}" type="slidenum">
-              <a:rPr lang="ru-RU" sz="1600" b="0" strike="noStrike" spc="-1">
-                <a:solidFill>
-                  <a:schemeClr val="accent6"/>
-                </a:solidFill>
-                <a:latin typeface="Inter"/>
-                <a:ea typeface="Inter"/>
-              </a:rPr>
-              <a:t>13</a:t>
-            </a:fld>
-            <a:endParaRPr lang="ru-RU" sz="1600" b="0" strike="noStrike" spc="-1">
-              <a:solidFill>
-                <a:srgbClr val="FFFFFF"/>
-              </a:solidFill>
-              <a:latin typeface="Arial"/>
-            </a:endParaRPr>
-          </a:p>
-        </p:txBody>
-      </p:sp>
-      <p:sp>
-        <p:nvSpPr>
-          <p:cNvPr id="303" name="Скругленный прямоугольник 1"/>
-          <p:cNvSpPr/>
-          <p:nvPr/>
-        </p:nvSpPr>
-        <p:spPr>
-          <a:xfrm>
-            <a:off x="2818800" y="798840"/>
-            <a:ext cx="14160240" cy="1618560"/>
-          </a:xfrm>
-          <a:prstGeom prst="roundRect">
-            <a:avLst>
-              <a:gd name="adj" fmla="val 30536"/>
-            </a:avLst>
-          </a:prstGeom>
-          <a:solidFill>
-            <a:srgbClr val="FFDD2D"/>
-          </a:solidFill>
-          <a:ln>
-            <a:noFill/>
-          </a:ln>
-        </p:spPr>
-        <p:style>
-          <a:lnRef idx="2">
-            <a:schemeClr val="accent1">
-              <a:shade val="15000"/>
-            </a:schemeClr>
-          </a:lnRef>
-          <a:fillRef idx="1">
-            <a:schemeClr val="accent1"/>
-          </a:fillRef>
-          <a:effectRef idx="0">
-            <a:schemeClr val="accent1"/>
-          </a:effectRef>
-          <a:fontRef idx="minor"/>
-        </p:style>
-        <p:txBody>
-          <a:bodyPr lIns="288000" tIns="0" rIns="288000" bIns="0" anchor="ctr">
-            <a:noAutofit/>
-          </a:bodyPr>
-          <a:lstStyle/>
-          <a:p>
-            <a:pPr>
-              <a:lnSpc>
-                <a:spcPts val="6999"/>
-              </a:lnSpc>
-            </a:pPr>
-            <a:r>
-              <a:rPr lang="ru-RU" sz="6000" b="1" strike="noStrike" spc="-1">
-                <a:solidFill>
-                  <a:srgbClr val="00402E"/>
-                </a:solidFill>
-                <a:latin typeface="Inter SemiBold"/>
-                <a:ea typeface="Inter SemiBold"/>
-              </a:rPr>
-              <a:t>Заключение</a:t>
-            </a:r>
-            <a:endParaRPr lang="ru-RU" sz="6000" b="0" strike="noStrike" spc="-1">
-              <a:solidFill>
-                <a:srgbClr val="000000"/>
-              </a:solidFill>
-              <a:latin typeface="Arial"/>
-            </a:endParaRPr>
-          </a:p>
-        </p:txBody>
-      </p:sp>
-    </p:spTree>
-  </p:cSld>
-  <p:clrMapOvr>
-    <a:masterClrMapping/>
-  </p:clrMapOvr>
-</p:sld>
-</file>
-
-<file path=ppt/slides/slide14.xml><?xml version="1.0" encoding="utf-8"?>
-<p:sld xmlns:a="http://schemas.openxmlformats.org/drawingml/2006/main" xmlns:r="http://schemas.openxmlformats.org/officeDocument/2006/relationships" xmlns:p="http://schemas.openxmlformats.org/presentationml/2006/main">
-  <p:cSld>
-    <p:bg>
-      <p:bgPr>
-        <a:solidFill>
-          <a:srgbClr val="00402E"/>
-        </a:solidFill>
-        <a:effectLst/>
-      </p:bgPr>
-    </p:bg>
-    <p:spTree>
-      <p:nvGrpSpPr>
-        <p:cNvPr id="1" name=""/>
-        <p:cNvGrpSpPr/>
-        <p:nvPr/>
-      </p:nvGrpSpPr>
-      <p:grpSpPr>
-        <a:xfrm>
-          <a:off x="0" y="0"/>
-          <a:ext cx="0" cy="0"/>
-          <a:chOff x="0" y="0"/>
-          <a:chExt cx="0" cy="0"/>
-        </a:xfrm>
-      </p:grpSpPr>
-      <p:sp>
-        <p:nvSpPr>
-          <p:cNvPr id="304" name="Номер слайда 1"/>
-          <p:cNvSpPr/>
-          <p:nvPr/>
-        </p:nvSpPr>
-        <p:spPr>
-          <a:xfrm>
-            <a:off x="18410400" y="10492560"/>
-            <a:ext cx="1067400" cy="424800"/>
-          </a:xfrm>
-          <a:prstGeom prst="rect">
-            <a:avLst/>
-          </a:prstGeom>
-          <a:noFill/>
-          <a:ln w="0">
-            <a:noFill/>
-          </a:ln>
-        </p:spPr>
-        <p:style>
-          <a:lnRef idx="0">
-            <a:scrgbClr r="0" g="0" b="0"/>
-          </a:lnRef>
-          <a:fillRef idx="0">
-            <a:scrgbClr r="0" g="0" b="0"/>
-          </a:fillRef>
-          <a:effectRef idx="0">
-            <a:scrgbClr r="0" g="0" b="0"/>
-          </a:effectRef>
-          <a:fontRef idx="minor"/>
-        </p:style>
-        <p:txBody>
           <a:bodyPr lIns="90000" tIns="45000" rIns="90000" bIns="45000" anchor="t">
             <a:noAutofit/>
           </a:bodyPr>
@@ -18566,7 +17963,7 @@
                 <a:latin typeface="Inter"/>
                 <a:ea typeface="Inter"/>
               </a:rPr>
-              <a:t>14</a:t>
+              <a:t>12</a:t>
             </a:fld>
             <a:endParaRPr lang="ru-RU" sz="1600" b="0" strike="noStrike" spc="-1">
               <a:solidFill>
@@ -19749,7 +19146,7 @@
                 <a:latin typeface="Inter SemiBold"/>
                 <a:ea typeface="Inter SemiBold"/>
               </a:rPr>
-              <a:t>Стартовое окно.</a:t>
+              <a:t>Стартовое окно</a:t>
             </a:r>
             <a:endParaRPr lang="ru-RU" sz="6000" b="0" strike="noStrike" spc="-1" dirty="0">
               <a:solidFill>
@@ -19760,6 +19157,36 @@
           </a:p>
         </p:txBody>
       </p:sp>
+      <p:pic>
+        <p:nvPicPr>
+          <p:cNvPr id="3" name="Рисунок 2">
+            <a:extLst>
+              <a:ext uri="{FF2B5EF4-FFF2-40B4-BE49-F238E27FC236}">
+                <a16:creationId xmlns:a16="http://schemas.microsoft.com/office/drawing/2014/main" id="{BF2881C6-2956-887C-5F83-F2DCEEEC482C}"/>
+              </a:ext>
+            </a:extLst>
+          </p:cNvPr>
+          <p:cNvPicPr>
+            <a:picLocks noChangeAspect="1"/>
+          </p:cNvPicPr>
+          <p:nvPr/>
+        </p:nvPicPr>
+        <p:blipFill>
+          <a:blip r:embed="rId2"/>
+          <a:stretch>
+            <a:fillRect/>
+          </a:stretch>
+        </p:blipFill>
+        <p:spPr>
+          <a:xfrm>
+            <a:off x="5194300" y="2008187"/>
+            <a:ext cx="8582025" cy="7886700"/>
+          </a:xfrm>
+          <a:prstGeom prst="rect">
+            <a:avLst/>
+          </a:prstGeom>
+        </p:spPr>
+      </p:pic>
     </p:spTree>
   </p:cSld>
   <p:clrMapOvr>
@@ -19842,7 +19269,7 @@
         </p:nvSpPr>
         <p:spPr>
           <a:xfrm>
-            <a:off x="2819520" y="509760"/>
+            <a:off x="2295064" y="181147"/>
             <a:ext cx="14184000" cy="1197360"/>
           </a:xfrm>
           <a:prstGeom prst="roundRect">
@@ -19890,7 +19317,7 @@
                 <a:latin typeface="Inter SemiBold"/>
                 <a:ea typeface="Inter SemiBold"/>
               </a:rPr>
-              <a:t>Карта.</a:t>
+              <a:t>Карта</a:t>
             </a:r>
             <a:endParaRPr lang="ru-RU" sz="6000" b="0" strike="noStrike" spc="-1" dirty="0">
               <a:solidFill>
@@ -19901,6 +19328,156 @@
           </a:p>
         </p:txBody>
       </p:sp>
+      <p:pic>
+        <p:nvPicPr>
+          <p:cNvPr id="3" name="Рисунок 2">
+            <a:extLst>
+              <a:ext uri="{FF2B5EF4-FFF2-40B4-BE49-F238E27FC236}">
+                <a16:creationId xmlns:a16="http://schemas.microsoft.com/office/drawing/2014/main" id="{6194A4E5-0B39-67E1-5F87-046772C0B716}"/>
+              </a:ext>
+            </a:extLst>
+          </p:cNvPr>
+          <p:cNvPicPr>
+            <a:picLocks noChangeAspect="1"/>
+          </p:cNvPicPr>
+          <p:nvPr/>
+        </p:nvPicPr>
+        <p:blipFill>
+          <a:blip r:embed="rId2"/>
+          <a:stretch>
+            <a:fillRect/>
+          </a:stretch>
+        </p:blipFill>
+        <p:spPr>
+          <a:xfrm>
+            <a:off x="13843399" y="1378507"/>
+            <a:ext cx="5271331" cy="4836945"/>
+          </a:xfrm>
+          <a:prstGeom prst="rect">
+            <a:avLst/>
+          </a:prstGeom>
+        </p:spPr>
+      </p:pic>
+      <p:pic>
+        <p:nvPicPr>
+          <p:cNvPr id="5" name="Рисунок 4">
+            <a:extLst>
+              <a:ext uri="{FF2B5EF4-FFF2-40B4-BE49-F238E27FC236}">
+                <a16:creationId xmlns:a16="http://schemas.microsoft.com/office/drawing/2014/main" id="{7C545C19-DE9C-6A34-2CE0-FA572A15945C}"/>
+              </a:ext>
+            </a:extLst>
+          </p:cNvPr>
+          <p:cNvPicPr>
+            <a:picLocks noChangeAspect="1"/>
+          </p:cNvPicPr>
+          <p:nvPr/>
+        </p:nvPicPr>
+        <p:blipFill>
+          <a:blip r:embed="rId3"/>
+          <a:stretch>
+            <a:fillRect/>
+          </a:stretch>
+        </p:blipFill>
+        <p:spPr>
+          <a:xfrm>
+            <a:off x="7121873" y="1378507"/>
+            <a:ext cx="5885545" cy="4836945"/>
+          </a:xfrm>
+          <a:prstGeom prst="rect">
+            <a:avLst/>
+          </a:prstGeom>
+        </p:spPr>
+      </p:pic>
+      <p:pic>
+        <p:nvPicPr>
+          <p:cNvPr id="7" name="Рисунок 6">
+            <a:extLst>
+              <a:ext uri="{FF2B5EF4-FFF2-40B4-BE49-F238E27FC236}">
+                <a16:creationId xmlns:a16="http://schemas.microsoft.com/office/drawing/2014/main" id="{6A08DB14-497A-10E3-85BD-E75C07D61309}"/>
+              </a:ext>
+            </a:extLst>
+          </p:cNvPr>
+          <p:cNvPicPr>
+            <a:picLocks noChangeAspect="1"/>
+          </p:cNvPicPr>
+          <p:nvPr/>
+        </p:nvPicPr>
+        <p:blipFill>
+          <a:blip r:embed="rId4"/>
+          <a:stretch>
+            <a:fillRect/>
+          </a:stretch>
+        </p:blipFill>
+        <p:spPr>
+          <a:xfrm>
+            <a:off x="585782" y="1378507"/>
+            <a:ext cx="5697585" cy="4836945"/>
+          </a:xfrm>
+          <a:prstGeom prst="rect">
+            <a:avLst/>
+          </a:prstGeom>
+        </p:spPr>
+      </p:pic>
+      <p:pic>
+        <p:nvPicPr>
+          <p:cNvPr id="9" name="Рисунок 8">
+            <a:extLst>
+              <a:ext uri="{FF2B5EF4-FFF2-40B4-BE49-F238E27FC236}">
+                <a16:creationId xmlns:a16="http://schemas.microsoft.com/office/drawing/2014/main" id="{5989580F-948D-0CD4-71C6-04F76A94B204}"/>
+              </a:ext>
+            </a:extLst>
+          </p:cNvPr>
+          <p:cNvPicPr>
+            <a:picLocks noChangeAspect="1"/>
+          </p:cNvPicPr>
+          <p:nvPr/>
+        </p:nvPicPr>
+        <p:blipFill>
+          <a:blip r:embed="rId5"/>
+          <a:stretch>
+            <a:fillRect/>
+          </a:stretch>
+        </p:blipFill>
+        <p:spPr>
+          <a:xfrm>
+            <a:off x="2771767" y="5880100"/>
+            <a:ext cx="6057346" cy="4836945"/>
+          </a:xfrm>
+          <a:prstGeom prst="rect">
+            <a:avLst/>
+          </a:prstGeom>
+        </p:spPr>
+      </p:pic>
+      <p:pic>
+        <p:nvPicPr>
+          <p:cNvPr id="11" name="Рисунок 10">
+            <a:extLst>
+              <a:ext uri="{FF2B5EF4-FFF2-40B4-BE49-F238E27FC236}">
+                <a16:creationId xmlns:a16="http://schemas.microsoft.com/office/drawing/2014/main" id="{E3FFBE7D-177E-6013-35C4-FACA1D07D78B}"/>
+              </a:ext>
+            </a:extLst>
+          </p:cNvPr>
+          <p:cNvPicPr>
+            <a:picLocks noChangeAspect="1"/>
+          </p:cNvPicPr>
+          <p:nvPr/>
+        </p:nvPicPr>
+        <p:blipFill>
+          <a:blip r:embed="rId6"/>
+          <a:stretch>
+            <a:fillRect/>
+          </a:stretch>
+        </p:blipFill>
+        <p:spPr>
+          <a:xfrm>
+            <a:off x="10781479" y="5880100"/>
+            <a:ext cx="6534971" cy="4836945"/>
+          </a:xfrm>
+          <a:prstGeom prst="rect">
+            <a:avLst/>
+          </a:prstGeom>
+        </p:spPr>
+      </p:pic>
     </p:spTree>
   </p:cSld>
   <p:clrMapOvr>
@@ -20033,16 +19610,6 @@
               </a:rPr>
               <a:t>Мини-игры</a:t>
             </a:r>
-            <a:r>
-              <a:rPr lang="ru-RU" sz="4800" b="1" strike="noStrike" spc="-1" dirty="0">
-                <a:solidFill>
-                  <a:schemeClr val="lt1"/>
-                </a:solidFill>
-                <a:latin typeface="Inter SemiBold"/>
-                <a:ea typeface="Inter SemiBold"/>
-              </a:rPr>
-              <a:t>.</a:t>
-            </a:r>
             <a:endParaRPr lang="ru-RU" sz="4800" b="0" strike="noStrike" spc="-1" dirty="0">
               <a:solidFill>
                 <a:srgbClr val="FFFFFF"/>
@@ -20052,6 +19619,126 @@
           </a:p>
         </p:txBody>
       </p:sp>
+      <p:pic>
+        <p:nvPicPr>
+          <p:cNvPr id="3" name="Рисунок 2">
+            <a:extLst>
+              <a:ext uri="{FF2B5EF4-FFF2-40B4-BE49-F238E27FC236}">
+                <a16:creationId xmlns:a16="http://schemas.microsoft.com/office/drawing/2014/main" id="{6BC47C13-9F70-F31F-5AAC-36F3BA57D7E1}"/>
+              </a:ext>
+            </a:extLst>
+          </p:cNvPr>
+          <p:cNvPicPr>
+            <a:picLocks noChangeAspect="1"/>
+          </p:cNvPicPr>
+          <p:nvPr/>
+        </p:nvPicPr>
+        <p:blipFill>
+          <a:blip r:embed="rId2"/>
+          <a:stretch>
+            <a:fillRect/>
+          </a:stretch>
+        </p:blipFill>
+        <p:spPr>
+          <a:xfrm>
+            <a:off x="10013778" y="6170843"/>
+            <a:ext cx="4940222" cy="4534477"/>
+          </a:xfrm>
+          <a:prstGeom prst="rect">
+            <a:avLst/>
+          </a:prstGeom>
+        </p:spPr>
+      </p:pic>
+      <p:pic>
+        <p:nvPicPr>
+          <p:cNvPr id="5" name="Рисунок 4">
+            <a:extLst>
+              <a:ext uri="{FF2B5EF4-FFF2-40B4-BE49-F238E27FC236}">
+                <a16:creationId xmlns:a16="http://schemas.microsoft.com/office/drawing/2014/main" id="{EE2CD95C-8A74-703A-3955-2CEC14DD98B3}"/>
+              </a:ext>
+            </a:extLst>
+          </p:cNvPr>
+          <p:cNvPicPr>
+            <a:picLocks noChangeAspect="1"/>
+          </p:cNvPicPr>
+          <p:nvPr/>
+        </p:nvPicPr>
+        <p:blipFill>
+          <a:blip r:embed="rId3"/>
+          <a:stretch>
+            <a:fillRect/>
+          </a:stretch>
+        </p:blipFill>
+        <p:spPr>
+          <a:xfrm>
+            <a:off x="13412783" y="1366029"/>
+            <a:ext cx="4531843" cy="4173534"/>
+          </a:xfrm>
+          <a:prstGeom prst="rect">
+            <a:avLst/>
+          </a:prstGeom>
+        </p:spPr>
+      </p:pic>
+      <p:pic>
+        <p:nvPicPr>
+          <p:cNvPr id="7" name="Рисунок 6">
+            <a:extLst>
+              <a:ext uri="{FF2B5EF4-FFF2-40B4-BE49-F238E27FC236}">
+                <a16:creationId xmlns:a16="http://schemas.microsoft.com/office/drawing/2014/main" id="{F0DD29C5-6A3A-09F8-A6AD-BCA990F9C0ED}"/>
+              </a:ext>
+            </a:extLst>
+          </p:cNvPr>
+          <p:cNvPicPr>
+            <a:picLocks noChangeAspect="1"/>
+          </p:cNvPicPr>
+          <p:nvPr/>
+        </p:nvPicPr>
+        <p:blipFill>
+          <a:blip r:embed="rId4"/>
+          <a:stretch>
+            <a:fillRect/>
+          </a:stretch>
+        </p:blipFill>
+        <p:spPr>
+          <a:xfrm>
+            <a:off x="1574444" y="1406528"/>
+            <a:ext cx="4669200" cy="4306846"/>
+          </a:xfrm>
+          <a:prstGeom prst="rect">
+            <a:avLst/>
+          </a:prstGeom>
+        </p:spPr>
+      </p:pic>
+      <p:pic>
+        <p:nvPicPr>
+          <p:cNvPr id="9" name="Рисунок 8">
+            <a:extLst>
+              <a:ext uri="{FF2B5EF4-FFF2-40B4-BE49-F238E27FC236}">
+                <a16:creationId xmlns:a16="http://schemas.microsoft.com/office/drawing/2014/main" id="{53D7D409-A338-4662-C92A-F3AF896D86FD}"/>
+              </a:ext>
+            </a:extLst>
+          </p:cNvPr>
+          <p:cNvPicPr>
+            <a:picLocks noChangeAspect="1"/>
+          </p:cNvPicPr>
+          <p:nvPr/>
+        </p:nvPicPr>
+        <p:blipFill>
+          <a:blip r:embed="rId5"/>
+          <a:stretch>
+            <a:fillRect/>
+          </a:stretch>
+        </p:blipFill>
+        <p:spPr>
+          <a:xfrm>
+            <a:off x="3648340" y="6170843"/>
+            <a:ext cx="4732138" cy="4358409"/>
+          </a:xfrm>
+          <a:prstGeom prst="rect">
+            <a:avLst/>
+          </a:prstGeom>
+        </p:spPr>
+      </p:pic>
     </p:spTree>
   </p:cSld>
   <p:clrMapOvr>
@@ -20193,6 +19880,66 @@
           </a:p>
         </p:txBody>
       </p:sp>
+      <p:pic>
+        <p:nvPicPr>
+          <p:cNvPr id="3" name="Рисунок 2">
+            <a:extLst>
+              <a:ext uri="{FF2B5EF4-FFF2-40B4-BE49-F238E27FC236}">
+                <a16:creationId xmlns:a16="http://schemas.microsoft.com/office/drawing/2014/main" id="{961CD7C0-86B9-4240-DB3C-E23FCB6EA44E}"/>
+              </a:ext>
+            </a:extLst>
+          </p:cNvPr>
+          <p:cNvPicPr>
+            <a:picLocks noChangeAspect="1"/>
+          </p:cNvPicPr>
+          <p:nvPr/>
+        </p:nvPicPr>
+        <p:blipFill>
+          <a:blip r:embed="rId2"/>
+          <a:stretch>
+            <a:fillRect/>
+          </a:stretch>
+        </p:blipFill>
+        <p:spPr>
+          <a:xfrm>
+            <a:off x="855662" y="2222500"/>
+            <a:ext cx="8515350" cy="7772400"/>
+          </a:xfrm>
+          <a:prstGeom prst="rect">
+            <a:avLst/>
+          </a:prstGeom>
+        </p:spPr>
+      </p:pic>
+      <p:pic>
+        <p:nvPicPr>
+          <p:cNvPr id="5" name="Рисунок 4">
+            <a:extLst>
+              <a:ext uri="{FF2B5EF4-FFF2-40B4-BE49-F238E27FC236}">
+                <a16:creationId xmlns:a16="http://schemas.microsoft.com/office/drawing/2014/main" id="{0D2824F6-F39B-1511-EA6B-9EDC9AEB75F0}"/>
+              </a:ext>
+            </a:extLst>
+          </p:cNvPr>
+          <p:cNvPicPr>
+            <a:picLocks noChangeAspect="1"/>
+          </p:cNvPicPr>
+          <p:nvPr/>
+        </p:nvPicPr>
+        <p:blipFill>
+          <a:blip r:embed="rId3"/>
+          <a:stretch>
+            <a:fillRect/>
+          </a:stretch>
+        </p:blipFill>
+        <p:spPr>
+          <a:xfrm>
+            <a:off x="10185402" y="2108200"/>
+            <a:ext cx="8582025" cy="7886700"/>
+          </a:xfrm>
+          <a:prstGeom prst="rect">
+            <a:avLst/>
+          </a:prstGeom>
+        </p:spPr>
+      </p:pic>
     </p:spTree>
   </p:cSld>
   <p:clrMapOvr>
@@ -20654,6 +20401,66 @@
           </a:p>
         </p:txBody>
       </p:sp>
+      <p:pic>
+        <p:nvPicPr>
+          <p:cNvPr id="3" name="Рисунок 2">
+            <a:extLst>
+              <a:ext uri="{FF2B5EF4-FFF2-40B4-BE49-F238E27FC236}">
+                <a16:creationId xmlns:a16="http://schemas.microsoft.com/office/drawing/2014/main" id="{A25750F4-4A15-77BB-8B29-369B7CFFA679}"/>
+              </a:ext>
+            </a:extLst>
+          </p:cNvPr>
+          <p:cNvPicPr>
+            <a:picLocks noChangeAspect="1"/>
+          </p:cNvPicPr>
+          <p:nvPr/>
+        </p:nvPicPr>
+        <p:blipFill>
+          <a:blip r:embed="rId2"/>
+          <a:stretch>
+            <a:fillRect/>
+          </a:stretch>
+        </p:blipFill>
+        <p:spPr>
+          <a:xfrm>
+            <a:off x="1292311" y="3910680"/>
+            <a:ext cx="7531649" cy="6913753"/>
+          </a:xfrm>
+          <a:prstGeom prst="rect">
+            <a:avLst/>
+          </a:prstGeom>
+        </p:spPr>
+      </p:pic>
+      <p:pic>
+        <p:nvPicPr>
+          <p:cNvPr id="5" name="Рисунок 4">
+            <a:extLst>
+              <a:ext uri="{FF2B5EF4-FFF2-40B4-BE49-F238E27FC236}">
+                <a16:creationId xmlns:a16="http://schemas.microsoft.com/office/drawing/2014/main" id="{7866D6DB-31D7-C351-455E-A91721039A6E}"/>
+              </a:ext>
+            </a:extLst>
+          </p:cNvPr>
+          <p:cNvPicPr>
+            <a:picLocks noChangeAspect="1"/>
+          </p:cNvPicPr>
+          <p:nvPr/>
+        </p:nvPicPr>
+        <p:blipFill>
+          <a:blip r:embed="rId3"/>
+          <a:stretch>
+            <a:fillRect/>
+          </a:stretch>
+        </p:blipFill>
+        <p:spPr>
+          <a:xfrm>
+            <a:off x="10061299" y="3766670"/>
+            <a:ext cx="7651566" cy="7057763"/>
+          </a:xfrm>
+          <a:prstGeom prst="rect">
+            <a:avLst/>
+          </a:prstGeom>
+        </p:spPr>
+      </p:pic>
     </p:spTree>
   </p:cSld>
   <p:clrMapOvr>
@@ -21113,6 +20920,66 @@
           </a:p>
         </p:txBody>
       </p:sp>
+      <p:pic>
+        <p:nvPicPr>
+          <p:cNvPr id="3" name="Рисунок 2">
+            <a:extLst>
+              <a:ext uri="{FF2B5EF4-FFF2-40B4-BE49-F238E27FC236}">
+                <a16:creationId xmlns:a16="http://schemas.microsoft.com/office/drawing/2014/main" id="{DBAA41E7-FC01-D380-87FC-6BAB25676A2A}"/>
+              </a:ext>
+            </a:extLst>
+          </p:cNvPr>
+          <p:cNvPicPr>
+            <a:picLocks noChangeAspect="1"/>
+          </p:cNvPicPr>
+          <p:nvPr/>
+        </p:nvPicPr>
+        <p:blipFill>
+          <a:blip r:embed="rId2"/>
+          <a:stretch>
+            <a:fillRect/>
+          </a:stretch>
+        </p:blipFill>
+        <p:spPr>
+          <a:xfrm>
+            <a:off x="10261208" y="3985830"/>
+            <a:ext cx="7377863" cy="6812855"/>
+          </a:xfrm>
+          <a:prstGeom prst="rect">
+            <a:avLst/>
+          </a:prstGeom>
+        </p:spPr>
+      </p:pic>
+      <p:pic>
+        <p:nvPicPr>
+          <p:cNvPr id="5" name="Рисунок 4">
+            <a:extLst>
+              <a:ext uri="{FF2B5EF4-FFF2-40B4-BE49-F238E27FC236}">
+                <a16:creationId xmlns:a16="http://schemas.microsoft.com/office/drawing/2014/main" id="{32B3F8A6-2779-ECB9-29E2-A487DCDB5052}"/>
+              </a:ext>
+            </a:extLst>
+          </p:cNvPr>
+          <p:cNvPicPr>
+            <a:picLocks noChangeAspect="1"/>
+          </p:cNvPicPr>
+          <p:nvPr/>
+        </p:nvPicPr>
+        <p:blipFill>
+          <a:blip r:embed="rId3"/>
+          <a:stretch>
+            <a:fillRect/>
+          </a:stretch>
+        </p:blipFill>
+        <p:spPr>
+          <a:xfrm>
+            <a:off x="1394231" y="3985830"/>
+            <a:ext cx="7424689" cy="6812855"/>
+          </a:xfrm>
+          <a:prstGeom prst="rect">
+            <a:avLst/>
+          </a:prstGeom>
+        </p:spPr>
+      </p:pic>
     </p:spTree>
   </p:cSld>
   <p:clrMapOvr>

--- a/data/Presentation_and_note/Better_together.pptx
+++ b/data/Presentation_and_note/Better_together.pptx
@@ -122,7 +122,7 @@
   </p:defaultTextStyle>
   <p:extLst>
     <p:ext uri="{EFAFB233-063F-42B5-8137-9DF3F51BA10A}">
-      <p15:sldGuideLst xmlns:p15="http://schemas.microsoft.com/office/powerpoint/2012/main"/>
+      <p15:sldGuideLst xmlns:p15="http://schemas.microsoft.com/office/powerpoint/2012/main" xmlns=""/>
     </p:ext>
   </p:extLst>
 </p:presentation>
@@ -17528,7 +17528,7 @@
           <p:cNvPr id="1028" name="Picture 4" descr="Picture background">
             <a:extLst>
               <a:ext uri="{FF2B5EF4-FFF2-40B4-BE49-F238E27FC236}">
-                <a16:creationId xmlns:a16="http://schemas.microsoft.com/office/drawing/2014/main" id="{5B3D635D-C97F-DA28-305F-B7364A41F242}"/>
+                <a16:creationId xmlns:a16="http://schemas.microsoft.com/office/drawing/2014/main" xmlns="" id="{5B3D635D-C97F-DA28-305F-B7364A41F242}"/>
               </a:ext>
             </a:extLst>
           </p:cNvPr>
@@ -18465,7 +18465,7 @@
           </a:bodyPr>
           <a:lstStyle/>
           <a:p>
-            <a:pPr>
+            <a:pPr algn="ctr">
               <a:lnSpc>
                 <a:spcPts val="4000"/>
               </a:lnSpc>
@@ -18529,7 +18529,7 @@
           </a:bodyPr>
           <a:lstStyle/>
           <a:p>
-            <a:pPr>
+            <a:pPr algn="ctr">
               <a:lnSpc>
                 <a:spcPts val="4000"/>
               </a:lnSpc>
@@ -18593,7 +18593,7 @@
           </a:bodyPr>
           <a:lstStyle/>
           <a:p>
-            <a:pPr>
+            <a:pPr algn="ctr">
               <a:lnSpc>
                 <a:spcPts val="4000"/>
               </a:lnSpc>
@@ -18739,7 +18739,7 @@
               <a:t>Создать игру, которая </a:t>
             </a:r>
             <a:r>
-              <a:rPr lang="ru-RU" sz="3600" b="1" spc="-1" dirty="0">
+              <a:rPr lang="ru-RU" sz="3200" b="1" spc="-1" dirty="0">
                 <a:solidFill>
                   <a:srgbClr val="00402E"/>
                 </a:solidFill>
@@ -18748,13 +18748,31 @@
               <a:t>дает</a:t>
             </a:r>
             <a:r>
+              <a:rPr lang="ru-RU" sz="3200" b="1" strike="noStrike" spc="-1" dirty="0">
+                <a:solidFill>
+                  <a:srgbClr val="00402E"/>
+                </a:solidFill>
+                <a:latin typeface="Inter SemiBold"/>
+              </a:rPr>
+              <a:t> пользователю возможность исследования интерактивной карты, на которой расположены различные точки, запускающие </a:t>
+            </a:r>
+            <a:r>
+              <a:rPr lang="ru-RU" sz="3600" b="1" strike="noStrike" spc="-1" dirty="0" smtClean="0">
+                <a:solidFill>
+                  <a:srgbClr val="00402E"/>
+                </a:solidFill>
+                <a:latin typeface="Inter SemiBold"/>
+              </a:rPr>
+              <a:t>мини-игры</a:t>
+            </a:r>
+            <a:r>
               <a:rPr lang="ru-RU" sz="3600" b="1" strike="noStrike" spc="-1" dirty="0">
                 <a:solidFill>
                   <a:srgbClr val="00402E"/>
                 </a:solidFill>
                 <a:latin typeface="Inter SemiBold"/>
               </a:rPr>
-              <a:t> пользователю возможность исследования интерактивной карты, на которой расположены различные точки, запускающие мини-игры.</a:t>
+              <a:t>.</a:t>
             </a:r>
           </a:p>
         </p:txBody>
@@ -18854,7 +18872,7 @@
           </a:bodyPr>
           <a:lstStyle/>
           <a:p>
-            <a:pPr>
+            <a:pPr algn="ctr">
               <a:lnSpc>
                 <a:spcPts val="4000"/>
               </a:lnSpc>
@@ -19162,7 +19180,7 @@
           <p:cNvPr id="3" name="Рисунок 2">
             <a:extLst>
               <a:ext uri="{FF2B5EF4-FFF2-40B4-BE49-F238E27FC236}">
-                <a16:creationId xmlns:a16="http://schemas.microsoft.com/office/drawing/2014/main" id="{BF2881C6-2956-887C-5F83-F2DCEEEC482C}"/>
+                <a16:creationId xmlns:a16="http://schemas.microsoft.com/office/drawing/2014/main" xmlns="" id="{BF2881C6-2956-887C-5F83-F2DCEEEC482C}"/>
               </a:ext>
             </a:extLst>
           </p:cNvPr>
@@ -19333,7 +19351,7 @@
           <p:cNvPr id="3" name="Рисунок 2">
             <a:extLst>
               <a:ext uri="{FF2B5EF4-FFF2-40B4-BE49-F238E27FC236}">
-                <a16:creationId xmlns:a16="http://schemas.microsoft.com/office/drawing/2014/main" id="{6194A4E5-0B39-67E1-5F87-046772C0B716}"/>
+                <a16:creationId xmlns:a16="http://schemas.microsoft.com/office/drawing/2014/main" xmlns="" id="{6194A4E5-0B39-67E1-5F87-046772C0B716}"/>
               </a:ext>
             </a:extLst>
           </p:cNvPr>
@@ -19363,7 +19381,7 @@
           <p:cNvPr id="5" name="Рисунок 4">
             <a:extLst>
               <a:ext uri="{FF2B5EF4-FFF2-40B4-BE49-F238E27FC236}">
-                <a16:creationId xmlns:a16="http://schemas.microsoft.com/office/drawing/2014/main" id="{7C545C19-DE9C-6A34-2CE0-FA572A15945C}"/>
+                <a16:creationId xmlns:a16="http://schemas.microsoft.com/office/drawing/2014/main" xmlns="" id="{7C545C19-DE9C-6A34-2CE0-FA572A15945C}"/>
               </a:ext>
             </a:extLst>
           </p:cNvPr>
@@ -19393,7 +19411,7 @@
           <p:cNvPr id="7" name="Рисунок 6">
             <a:extLst>
               <a:ext uri="{FF2B5EF4-FFF2-40B4-BE49-F238E27FC236}">
-                <a16:creationId xmlns:a16="http://schemas.microsoft.com/office/drawing/2014/main" id="{6A08DB14-497A-10E3-85BD-E75C07D61309}"/>
+                <a16:creationId xmlns:a16="http://schemas.microsoft.com/office/drawing/2014/main" xmlns="" id="{6A08DB14-497A-10E3-85BD-E75C07D61309}"/>
               </a:ext>
             </a:extLst>
           </p:cNvPr>
@@ -19423,7 +19441,7 @@
           <p:cNvPr id="9" name="Рисунок 8">
             <a:extLst>
               <a:ext uri="{FF2B5EF4-FFF2-40B4-BE49-F238E27FC236}">
-                <a16:creationId xmlns:a16="http://schemas.microsoft.com/office/drawing/2014/main" id="{5989580F-948D-0CD4-71C6-04F76A94B204}"/>
+                <a16:creationId xmlns:a16="http://schemas.microsoft.com/office/drawing/2014/main" xmlns="" id="{5989580F-948D-0CD4-71C6-04F76A94B204}"/>
               </a:ext>
             </a:extLst>
           </p:cNvPr>
@@ -19453,7 +19471,7 @@
           <p:cNvPr id="11" name="Рисунок 10">
             <a:extLst>
               <a:ext uri="{FF2B5EF4-FFF2-40B4-BE49-F238E27FC236}">
-                <a16:creationId xmlns:a16="http://schemas.microsoft.com/office/drawing/2014/main" id="{E3FFBE7D-177E-6013-35C4-FACA1D07D78B}"/>
+                <a16:creationId xmlns:a16="http://schemas.microsoft.com/office/drawing/2014/main" xmlns="" id="{E3FFBE7D-177E-6013-35C4-FACA1D07D78B}"/>
               </a:ext>
             </a:extLst>
           </p:cNvPr>
@@ -19624,7 +19642,7 @@
           <p:cNvPr id="3" name="Рисунок 2">
             <a:extLst>
               <a:ext uri="{FF2B5EF4-FFF2-40B4-BE49-F238E27FC236}">
-                <a16:creationId xmlns:a16="http://schemas.microsoft.com/office/drawing/2014/main" id="{6BC47C13-9F70-F31F-5AAC-36F3BA57D7E1}"/>
+                <a16:creationId xmlns:a16="http://schemas.microsoft.com/office/drawing/2014/main" xmlns="" id="{6BC47C13-9F70-F31F-5AAC-36F3BA57D7E1}"/>
               </a:ext>
             </a:extLst>
           </p:cNvPr>
@@ -19654,7 +19672,7 @@
           <p:cNvPr id="5" name="Рисунок 4">
             <a:extLst>
               <a:ext uri="{FF2B5EF4-FFF2-40B4-BE49-F238E27FC236}">
-                <a16:creationId xmlns:a16="http://schemas.microsoft.com/office/drawing/2014/main" id="{EE2CD95C-8A74-703A-3955-2CEC14DD98B3}"/>
+                <a16:creationId xmlns:a16="http://schemas.microsoft.com/office/drawing/2014/main" xmlns="" id="{EE2CD95C-8A74-703A-3955-2CEC14DD98B3}"/>
               </a:ext>
             </a:extLst>
           </p:cNvPr>
@@ -19684,7 +19702,7 @@
           <p:cNvPr id="7" name="Рисунок 6">
             <a:extLst>
               <a:ext uri="{FF2B5EF4-FFF2-40B4-BE49-F238E27FC236}">
-                <a16:creationId xmlns:a16="http://schemas.microsoft.com/office/drawing/2014/main" id="{F0DD29C5-6A3A-09F8-A6AD-BCA990F9C0ED}"/>
+                <a16:creationId xmlns:a16="http://schemas.microsoft.com/office/drawing/2014/main" xmlns="" id="{F0DD29C5-6A3A-09F8-A6AD-BCA990F9C0ED}"/>
               </a:ext>
             </a:extLst>
           </p:cNvPr>
@@ -19714,7 +19732,7 @@
           <p:cNvPr id="9" name="Рисунок 8">
             <a:extLst>
               <a:ext uri="{FF2B5EF4-FFF2-40B4-BE49-F238E27FC236}">
-                <a16:creationId xmlns:a16="http://schemas.microsoft.com/office/drawing/2014/main" id="{53D7D409-A338-4662-C92A-F3AF896D86FD}"/>
+                <a16:creationId xmlns:a16="http://schemas.microsoft.com/office/drawing/2014/main" xmlns="" id="{53D7D409-A338-4662-C92A-F3AF896D86FD}"/>
               </a:ext>
             </a:extLst>
           </p:cNvPr>
@@ -19885,7 +19903,7 @@
           <p:cNvPr id="3" name="Рисунок 2">
             <a:extLst>
               <a:ext uri="{FF2B5EF4-FFF2-40B4-BE49-F238E27FC236}">
-                <a16:creationId xmlns:a16="http://schemas.microsoft.com/office/drawing/2014/main" id="{961CD7C0-86B9-4240-DB3C-E23FCB6EA44E}"/>
+                <a16:creationId xmlns:a16="http://schemas.microsoft.com/office/drawing/2014/main" xmlns="" id="{961CD7C0-86B9-4240-DB3C-E23FCB6EA44E}"/>
               </a:ext>
             </a:extLst>
           </p:cNvPr>
@@ -19915,7 +19933,7 @@
           <p:cNvPr id="5" name="Рисунок 4">
             <a:extLst>
               <a:ext uri="{FF2B5EF4-FFF2-40B4-BE49-F238E27FC236}">
-                <a16:creationId xmlns:a16="http://schemas.microsoft.com/office/drawing/2014/main" id="{0D2824F6-F39B-1511-EA6B-9EDC9AEB75F0}"/>
+                <a16:creationId xmlns:a16="http://schemas.microsoft.com/office/drawing/2014/main" xmlns="" id="{0D2824F6-F39B-1511-EA6B-9EDC9AEB75F0}"/>
               </a:ext>
             </a:extLst>
           </p:cNvPr>
@@ -20406,7 +20424,7 @@
           <p:cNvPr id="3" name="Рисунок 2">
             <a:extLst>
               <a:ext uri="{FF2B5EF4-FFF2-40B4-BE49-F238E27FC236}">
-                <a16:creationId xmlns:a16="http://schemas.microsoft.com/office/drawing/2014/main" id="{A25750F4-4A15-77BB-8B29-369B7CFFA679}"/>
+                <a16:creationId xmlns:a16="http://schemas.microsoft.com/office/drawing/2014/main" xmlns="" id="{A25750F4-4A15-77BB-8B29-369B7CFFA679}"/>
               </a:ext>
             </a:extLst>
           </p:cNvPr>
@@ -20436,7 +20454,7 @@
           <p:cNvPr id="5" name="Рисунок 4">
             <a:extLst>
               <a:ext uri="{FF2B5EF4-FFF2-40B4-BE49-F238E27FC236}">
-                <a16:creationId xmlns:a16="http://schemas.microsoft.com/office/drawing/2014/main" id="{7866D6DB-31D7-C351-455E-A91721039A6E}"/>
+                <a16:creationId xmlns:a16="http://schemas.microsoft.com/office/drawing/2014/main" xmlns="" id="{7866D6DB-31D7-C351-455E-A91721039A6E}"/>
               </a:ext>
             </a:extLst>
           </p:cNvPr>
@@ -20925,7 +20943,7 @@
           <p:cNvPr id="3" name="Рисунок 2">
             <a:extLst>
               <a:ext uri="{FF2B5EF4-FFF2-40B4-BE49-F238E27FC236}">
-                <a16:creationId xmlns:a16="http://schemas.microsoft.com/office/drawing/2014/main" id="{DBAA41E7-FC01-D380-87FC-6BAB25676A2A}"/>
+                <a16:creationId xmlns:a16="http://schemas.microsoft.com/office/drawing/2014/main" xmlns="" id="{DBAA41E7-FC01-D380-87FC-6BAB25676A2A}"/>
               </a:ext>
             </a:extLst>
           </p:cNvPr>
@@ -20955,7 +20973,7 @@
           <p:cNvPr id="5" name="Рисунок 4">
             <a:extLst>
               <a:ext uri="{FF2B5EF4-FFF2-40B4-BE49-F238E27FC236}">
-                <a16:creationId xmlns:a16="http://schemas.microsoft.com/office/drawing/2014/main" id="{32B3F8A6-2779-ECB9-29E2-A487DCDB5052}"/>
+                <a16:creationId xmlns:a16="http://schemas.microsoft.com/office/drawing/2014/main" xmlns="" id="{32B3F8A6-2779-ECB9-29E2-A487DCDB5052}"/>
               </a:ext>
             </a:extLst>
           </p:cNvPr>
